--- a/Presentation.pptx
+++ b/Presentation.pptx
@@ -4600,7 +4600,7 @@
           <a:p>
             <a:fld id="{C764DE79-268F-4C1A-8933-263129D2AF90}" type="datetimeFigureOut">
               <a:rPr lang="en-US" smtClean="0"/>
-              <a:t>4/18/2025</a:t>
+              <a:t>9/19/2025</a:t>
             </a:fld>
             <a:endParaRPr lang="en-US" dirty="0"/>
           </a:p>
@@ -4851,7 +4851,7 @@
           <a:p>
             <a:fld id="{C764DE79-268F-4C1A-8933-263129D2AF90}" type="datetimeFigureOut">
               <a:rPr lang="en-US" smtClean="0"/>
-              <a:t>4/18/2025</a:t>
+              <a:t>9/19/2025</a:t>
             </a:fld>
             <a:endParaRPr lang="en-US" dirty="0"/>
           </a:p>
@@ -5165,7 +5165,7 @@
           <a:p>
             <a:fld id="{C764DE79-268F-4C1A-8933-263129D2AF90}" type="datetimeFigureOut">
               <a:rPr lang="en-US" smtClean="0"/>
-              <a:t>4/18/2025</a:t>
+              <a:t>9/19/2025</a:t>
             </a:fld>
             <a:endParaRPr lang="en-US" dirty="0"/>
           </a:p>
@@ -5506,7 +5506,7 @@
           <a:p>
             <a:fld id="{C764DE79-268F-4C1A-8933-263129D2AF90}" type="datetimeFigureOut">
               <a:rPr lang="en-US" smtClean="0"/>
-              <a:t>4/18/2025</a:t>
+              <a:t>9/19/2025</a:t>
             </a:fld>
             <a:endParaRPr lang="en-US" dirty="0"/>
           </a:p>
@@ -5820,7 +5820,7 @@
           <a:p>
             <a:fld id="{C764DE79-268F-4C1A-8933-263129D2AF90}" type="datetimeFigureOut">
               <a:rPr lang="en-US" smtClean="0"/>
-              <a:t>4/18/2025</a:t>
+              <a:t>9/19/2025</a:t>
             </a:fld>
             <a:endParaRPr lang="en-US" dirty="0"/>
           </a:p>
@@ -6213,7 +6213,7 @@
           <a:p>
             <a:fld id="{C764DE79-268F-4C1A-8933-263129D2AF90}" type="datetimeFigureOut">
               <a:rPr lang="en-US" smtClean="0"/>
-              <a:t>4/18/2025</a:t>
+              <a:t>9/19/2025</a:t>
             </a:fld>
             <a:endParaRPr lang="en-US" dirty="0"/>
           </a:p>
@@ -6383,7 +6383,7 @@
           <a:p>
             <a:fld id="{C764DE79-268F-4C1A-8933-263129D2AF90}" type="datetimeFigureOut">
               <a:rPr lang="en-US" smtClean="0"/>
-              <a:t>4/18/2025</a:t>
+              <a:t>9/19/2025</a:t>
             </a:fld>
             <a:endParaRPr lang="en-US" dirty="0"/>
           </a:p>
@@ -6563,7 +6563,7 @@
           <a:p>
             <a:fld id="{C764DE79-268F-4C1A-8933-263129D2AF90}" type="datetimeFigureOut">
               <a:rPr lang="en-US" smtClean="0"/>
-              <a:t>4/18/2025</a:t>
+              <a:t>9/19/2025</a:t>
             </a:fld>
             <a:endParaRPr lang="en-US" dirty="0"/>
           </a:p>
@@ -6739,7 +6739,7 @@
           <a:p>
             <a:fld id="{C764DE79-268F-4C1A-8933-263129D2AF90}" type="datetimeFigureOut">
               <a:rPr lang="en-US" smtClean="0"/>
-              <a:t>4/18/2025</a:t>
+              <a:t>9/19/2025</a:t>
             </a:fld>
             <a:endParaRPr lang="en-US" dirty="0"/>
           </a:p>
@@ -6986,7 +6986,7 @@
           <a:p>
             <a:fld id="{C764DE79-268F-4C1A-8933-263129D2AF90}" type="datetimeFigureOut">
               <a:rPr lang="en-US" smtClean="0"/>
-              <a:t>4/18/2025</a:t>
+              <a:t>9/19/2025</a:t>
             </a:fld>
             <a:endParaRPr lang="en-US" dirty="0"/>
           </a:p>
@@ -7218,7 +7218,7 @@
           <a:p>
             <a:fld id="{C764DE79-268F-4C1A-8933-263129D2AF90}" type="datetimeFigureOut">
               <a:rPr lang="en-US" smtClean="0"/>
-              <a:t>4/18/2025</a:t>
+              <a:t>9/19/2025</a:t>
             </a:fld>
             <a:endParaRPr lang="en-US" dirty="0"/>
           </a:p>
@@ -7592,7 +7592,7 @@
           <a:p>
             <a:fld id="{C764DE79-268F-4C1A-8933-263129D2AF90}" type="datetimeFigureOut">
               <a:rPr lang="en-US" smtClean="0"/>
-              <a:t>4/18/2025</a:t>
+              <a:t>9/19/2025</a:t>
             </a:fld>
             <a:endParaRPr lang="en-US" dirty="0"/>
           </a:p>
@@ -7715,7 +7715,7 @@
           <a:p>
             <a:fld id="{C764DE79-268F-4C1A-8933-263129D2AF90}" type="datetimeFigureOut">
               <a:rPr lang="en-US" smtClean="0"/>
-              <a:t>4/18/2025</a:t>
+              <a:t>9/19/2025</a:t>
             </a:fld>
             <a:endParaRPr lang="en-US" dirty="0"/>
           </a:p>
@@ -7810,7 +7810,7 @@
           <a:p>
             <a:fld id="{C764DE79-268F-4C1A-8933-263129D2AF90}" type="datetimeFigureOut">
               <a:rPr lang="en-US" smtClean="0"/>
-              <a:t>4/18/2025</a:t>
+              <a:t>9/19/2025</a:t>
             </a:fld>
             <a:endParaRPr lang="en-US" dirty="0"/>
           </a:p>
@@ -8065,7 +8065,7 @@
           <a:p>
             <a:fld id="{C764DE79-268F-4C1A-8933-263129D2AF90}" type="datetimeFigureOut">
               <a:rPr lang="en-US" smtClean="0"/>
-              <a:t>4/18/2025</a:t>
+              <a:t>9/19/2025</a:t>
             </a:fld>
             <a:endParaRPr lang="en-US" dirty="0"/>
           </a:p>
@@ -8328,7 +8328,7 @@
           <a:p>
             <a:fld id="{C764DE79-268F-4C1A-8933-263129D2AF90}" type="datetimeFigureOut">
               <a:rPr lang="en-US" smtClean="0"/>
-              <a:t>4/18/2025</a:t>
+              <a:t>9/19/2025</a:t>
             </a:fld>
             <a:endParaRPr lang="en-US" dirty="0"/>
           </a:p>
@@ -9071,7 +9071,7 @@
           <a:p>
             <a:fld id="{C764DE79-268F-4C1A-8933-263129D2AF90}" type="datetimeFigureOut">
               <a:rPr lang="en-US" smtClean="0"/>
-              <a:t>4/18/2025</a:t>
+              <a:t>9/19/2025</a:t>
             </a:fld>
             <a:endParaRPr lang="en-US" dirty="0"/>
           </a:p>
@@ -9755,10 +9755,10 @@
           <a:lstStyle/>
           <a:p>
             <a:r>
-              <a:rPr lang="en-US" sz="1600"/>
-              <a:t>Arun Kumar Gupta</a:t>
-            </a:r>
-            <a:endParaRPr lang="nb-NO" sz="1600"/>
+              <a:rPr lang="nb-NO" sz="1600"/>
+              <a:t>Ritu Permani</a:t>
+            </a:r>
+            <a:endParaRPr lang="nb-NO" sz="1600" dirty="0"/>
           </a:p>
         </p:txBody>
       </p:sp>
